--- a/research/agentic-moe-2026/20260627-exec-deck.pptx
+++ b/research/agentic-moe-2026/20260627-exec-deck.pptx
@@ -3222,7 +3222,7 @@
                 </a:solidFill>
                 <a:latin typeface="Cambria"/>
               </a:rPr>
-              <a:t>Agentic MoE 2026</a:t>
+              <a:t>MAOS Hub</a:t>
             </a:r>
           </a:p>
         </p:txBody>
@@ -3264,7 +3264,7 @@
                 </a:solidFill>
                 <a:latin typeface="Calibri"/>
               </a:rPr>
-              <a:t>Landscape &amp; Hub Orquestrador</a:t>
+              <a:t>Landscape &amp; Gating-Network (Agentic MoE 2026)</a:t>
             </a:r>
           </a:p>
         </p:txBody>
@@ -3390,7 +3390,7 @@
                 </a:solidFill>
                 <a:latin typeface="Calibri"/>
               </a:rPr>
-              <a:t>2026-06-27</a:t>
+              <a:t>2026-06-27 · reframe ADR-006 (Accepted 2026-06-29)</a:t>
             </a:r>
           </a:p>
         </p:txBody>
